--- a/preview/indice_DAX40/indice_DAX40.pptx
+++ b/preview/indice_DAX40/indice_DAX40.pptx
@@ -8215,7 +8215,7 @@
         <p:spPr>
           <a:xfrm>
             <a:off x="468000" y="1620000"/>
-            <a:ext cx="720000" cy="198000"/>
+            <a:ext cx="684000" cy="198000"/>
           </a:xfrm>
           <a:prstGeom prst="rect">
             <a:avLst/>
@@ -8248,8 +8248,8 @@
         </p:nvSpPr>
         <p:spPr>
           <a:xfrm>
-            <a:off x="1188000" y="1620000"/>
-            <a:ext cx="468000" cy="198000"/>
+            <a:off x="1152000" y="1620000"/>
+            <a:ext cx="540000" cy="198000"/>
           </a:xfrm>
           <a:prstGeom prst="rect">
             <a:avLst/>
@@ -8282,7 +8282,7 @@
         </p:nvSpPr>
         <p:spPr>
           <a:xfrm>
-            <a:off x="1655999" y="1620000"/>
+            <a:off x="1692000" y="1620000"/>
             <a:ext cx="540000" cy="198000"/>
           </a:xfrm>
           <a:prstGeom prst="rect">
@@ -8316,7 +8316,7 @@
         </p:nvSpPr>
         <p:spPr>
           <a:xfrm>
-            <a:off x="2196000" y="1620000"/>
+            <a:off x="2232000" y="1620000"/>
             <a:ext cx="540000" cy="198000"/>
           </a:xfrm>
           <a:prstGeom prst="rect">
@@ -8394,7 +8394,7 @@
         <p:spPr>
           <a:xfrm>
             <a:off x="468000" y="1915200"/>
-            <a:ext cx="720000" cy="198000"/>
+            <a:ext cx="684000" cy="198000"/>
           </a:xfrm>
           <a:prstGeom prst="rect">
             <a:avLst/>
@@ -8427,8 +8427,8 @@
         </p:nvSpPr>
         <p:spPr>
           <a:xfrm>
-            <a:off x="1188000" y="1915200"/>
-            <a:ext cx="468000" cy="198000"/>
+            <a:off x="1152000" y="1915200"/>
+            <a:ext cx="540000" cy="198000"/>
           </a:xfrm>
           <a:prstGeom prst="rect">
             <a:avLst/>
@@ -8461,7 +8461,7 @@
         </p:nvSpPr>
         <p:spPr>
           <a:xfrm>
-            <a:off x="1655999" y="1915200"/>
+            <a:off x="1692000" y="1915200"/>
             <a:ext cx="540000" cy="198000"/>
           </a:xfrm>
           <a:prstGeom prst="rect">
@@ -8495,7 +8495,7 @@
         </p:nvSpPr>
         <p:spPr>
           <a:xfrm>
-            <a:off x="2196000" y="1915200"/>
+            <a:off x="2232000" y="1915200"/>
             <a:ext cx="540000" cy="198000"/>
           </a:xfrm>
           <a:prstGeom prst="rect">
@@ -8573,7 +8573,7 @@
         <p:spPr>
           <a:xfrm>
             <a:off x="468000" y="2210400"/>
-            <a:ext cx="720000" cy="198000"/>
+            <a:ext cx="684000" cy="198000"/>
           </a:xfrm>
           <a:prstGeom prst="rect">
             <a:avLst/>
@@ -8606,8 +8606,8 @@
         </p:nvSpPr>
         <p:spPr>
           <a:xfrm>
-            <a:off x="1188000" y="2210400"/>
-            <a:ext cx="468000" cy="198000"/>
+            <a:off x="1152000" y="2210400"/>
+            <a:ext cx="540000" cy="198000"/>
           </a:xfrm>
           <a:prstGeom prst="rect">
             <a:avLst/>
@@ -8640,7 +8640,7 @@
         </p:nvSpPr>
         <p:spPr>
           <a:xfrm>
-            <a:off x="1655999" y="2210400"/>
+            <a:off x="1692000" y="2210400"/>
             <a:ext cx="540000" cy="198000"/>
           </a:xfrm>
           <a:prstGeom prst="rect">
@@ -8674,7 +8674,7 @@
         </p:nvSpPr>
         <p:spPr>
           <a:xfrm>
-            <a:off x="2196000" y="2210400"/>
+            <a:off x="2232000" y="2210400"/>
             <a:ext cx="540000" cy="198000"/>
           </a:xfrm>
           <a:prstGeom prst="rect">
@@ -9239,7 +9239,7 @@
         <p:spPr>
           <a:xfrm>
             <a:off x="3294000" y="1620000"/>
-            <a:ext cx="720000" cy="198000"/>
+            <a:ext cx="684000" cy="198000"/>
           </a:xfrm>
           <a:prstGeom prst="rect">
             <a:avLst/>
@@ -9272,8 +9272,8 @@
         </p:nvSpPr>
         <p:spPr>
           <a:xfrm>
-            <a:off x="4014000" y="1620000"/>
-            <a:ext cx="468000" cy="198000"/>
+            <a:off x="3978000" y="1620000"/>
+            <a:ext cx="540000" cy="198000"/>
           </a:xfrm>
           <a:prstGeom prst="rect">
             <a:avLst/>
@@ -9306,7 +9306,7 @@
         </p:nvSpPr>
         <p:spPr>
           <a:xfrm>
-            <a:off x="4482000" y="1620000"/>
+            <a:off x="4518000" y="1620000"/>
             <a:ext cx="540000" cy="198000"/>
           </a:xfrm>
           <a:prstGeom prst="rect">
@@ -9340,7 +9340,7 @@
         </p:nvSpPr>
         <p:spPr>
           <a:xfrm>
-            <a:off x="5022000" y="1620000"/>
+            <a:off x="5058000" y="1620000"/>
             <a:ext cx="540000" cy="198000"/>
           </a:xfrm>
           <a:prstGeom prst="rect">
@@ -9418,7 +9418,7 @@
         <p:spPr>
           <a:xfrm>
             <a:off x="3294000" y="1915200"/>
-            <a:ext cx="720000" cy="198000"/>
+            <a:ext cx="684000" cy="198000"/>
           </a:xfrm>
           <a:prstGeom prst="rect">
             <a:avLst/>
@@ -9451,8 +9451,8 @@
         </p:nvSpPr>
         <p:spPr>
           <a:xfrm>
-            <a:off x="4014000" y="1915200"/>
-            <a:ext cx="468000" cy="198000"/>
+            <a:off x="3978000" y="1915200"/>
+            <a:ext cx="540000" cy="198000"/>
           </a:xfrm>
           <a:prstGeom prst="rect">
             <a:avLst/>
@@ -9485,7 +9485,7 @@
         </p:nvSpPr>
         <p:spPr>
           <a:xfrm>
-            <a:off x="4482000" y="1915200"/>
+            <a:off x="4518000" y="1915200"/>
             <a:ext cx="540000" cy="198000"/>
           </a:xfrm>
           <a:prstGeom prst="rect">
@@ -9519,7 +9519,7 @@
         </p:nvSpPr>
         <p:spPr>
           <a:xfrm>
-            <a:off x="5022000" y="1915200"/>
+            <a:off x="5058000" y="1915200"/>
             <a:ext cx="540000" cy="198000"/>
           </a:xfrm>
           <a:prstGeom prst="rect">
@@ -9597,7 +9597,7 @@
         <p:spPr>
           <a:xfrm>
             <a:off x="3294000" y="2210400"/>
-            <a:ext cx="720000" cy="198000"/>
+            <a:ext cx="684000" cy="198000"/>
           </a:xfrm>
           <a:prstGeom prst="rect">
             <a:avLst/>
@@ -9630,8 +9630,8 @@
         </p:nvSpPr>
         <p:spPr>
           <a:xfrm>
-            <a:off x="4014000" y="2210400"/>
-            <a:ext cx="468000" cy="198000"/>
+            <a:off x="3978000" y="2210400"/>
+            <a:ext cx="540000" cy="198000"/>
           </a:xfrm>
           <a:prstGeom prst="rect">
             <a:avLst/>
@@ -9664,7 +9664,7 @@
         </p:nvSpPr>
         <p:spPr>
           <a:xfrm>
-            <a:off x="4482000" y="2210400"/>
+            <a:off x="4518000" y="2210400"/>
             <a:ext cx="540000" cy="198000"/>
           </a:xfrm>
           <a:prstGeom prst="rect">
@@ -9698,7 +9698,7 @@
         </p:nvSpPr>
         <p:spPr>
           <a:xfrm>
-            <a:off x="5022000" y="2210400"/>
+            <a:off x="5058000" y="2210400"/>
             <a:ext cx="540000" cy="198000"/>
           </a:xfrm>
           <a:prstGeom prst="rect">
@@ -10263,7 +10263,7 @@
         <p:spPr>
           <a:xfrm>
             <a:off x="6119999" y="1620000"/>
-            <a:ext cx="720000" cy="198000"/>
+            <a:ext cx="684000" cy="198000"/>
           </a:xfrm>
           <a:prstGeom prst="rect">
             <a:avLst/>
@@ -10296,8 +10296,8 @@
         </p:nvSpPr>
         <p:spPr>
           <a:xfrm>
-            <a:off x="6839999" y="1620000"/>
-            <a:ext cx="468000" cy="198000"/>
+            <a:off x="6803999" y="1620000"/>
+            <a:ext cx="540000" cy="198000"/>
           </a:xfrm>
           <a:prstGeom prst="rect">
             <a:avLst/>
@@ -10330,7 +10330,7 @@
         </p:nvSpPr>
         <p:spPr>
           <a:xfrm>
-            <a:off x="7307999" y="1620000"/>
+            <a:off x="7343999" y="1620000"/>
             <a:ext cx="540000" cy="198000"/>
           </a:xfrm>
           <a:prstGeom prst="rect">
@@ -10364,7 +10364,7 @@
         </p:nvSpPr>
         <p:spPr>
           <a:xfrm>
-            <a:off x="7847999" y="1620000"/>
+            <a:off x="7883999" y="1620000"/>
             <a:ext cx="540000" cy="198000"/>
           </a:xfrm>
           <a:prstGeom prst="rect">
@@ -10442,7 +10442,7 @@
         <p:spPr>
           <a:xfrm>
             <a:off x="6119999" y="1915200"/>
-            <a:ext cx="720000" cy="198000"/>
+            <a:ext cx="684000" cy="198000"/>
           </a:xfrm>
           <a:prstGeom prst="rect">
             <a:avLst/>
@@ -10475,8 +10475,8 @@
         </p:nvSpPr>
         <p:spPr>
           <a:xfrm>
-            <a:off x="6839999" y="1915200"/>
-            <a:ext cx="468000" cy="198000"/>
+            <a:off x="6803999" y="1915200"/>
+            <a:ext cx="540000" cy="198000"/>
           </a:xfrm>
           <a:prstGeom prst="rect">
             <a:avLst/>
@@ -10509,7 +10509,7 @@
         </p:nvSpPr>
         <p:spPr>
           <a:xfrm>
-            <a:off x="7307999" y="1915200"/>
+            <a:off x="7343999" y="1915200"/>
             <a:ext cx="540000" cy="198000"/>
           </a:xfrm>
           <a:prstGeom prst="rect">
@@ -10543,7 +10543,7 @@
         </p:nvSpPr>
         <p:spPr>
           <a:xfrm>
-            <a:off x="7847999" y="1915200"/>
+            <a:off x="7883999" y="1915200"/>
             <a:ext cx="540000" cy="198000"/>
           </a:xfrm>
           <a:prstGeom prst="rect">
@@ -10621,7 +10621,7 @@
         <p:spPr>
           <a:xfrm>
             <a:off x="6119999" y="2210400"/>
-            <a:ext cx="720000" cy="198000"/>
+            <a:ext cx="684000" cy="198000"/>
           </a:xfrm>
           <a:prstGeom prst="rect">
             <a:avLst/>
@@ -10654,8 +10654,8 @@
         </p:nvSpPr>
         <p:spPr>
           <a:xfrm>
-            <a:off x="6839999" y="2210400"/>
-            <a:ext cx="468000" cy="198000"/>
+            <a:off x="6803999" y="2210400"/>
+            <a:ext cx="540000" cy="198000"/>
           </a:xfrm>
           <a:prstGeom prst="rect">
             <a:avLst/>
@@ -10688,7 +10688,7 @@
         </p:nvSpPr>
         <p:spPr>
           <a:xfrm>
-            <a:off x="7307999" y="2210400"/>
+            <a:off x="7343999" y="2210400"/>
             <a:ext cx="540000" cy="198000"/>
           </a:xfrm>
           <a:prstGeom prst="rect">
@@ -10722,7 +10722,7 @@
         </p:nvSpPr>
         <p:spPr>
           <a:xfrm>
-            <a:off x="7847999" y="2210400"/>
+            <a:off x="7883999" y="2210400"/>
             <a:ext cx="540000" cy="198000"/>
           </a:xfrm>
           <a:prstGeom prst="rect">

--- a/preview/indice_DAX40/indice_DAX40.pptx
+++ b/preview/indice_DAX40/indice_DAX40.pptx
@@ -15343,7 +15343,7 @@
                   <a:srgbClr val="555555"/>
                 </a:solidFill>
               </a:rPr>
-              <a:t>DAX40  ·  Phase actuelle : Expansion avancee  ·  Sensibilités taux/PIB  ·  Signal de rotation</a:t>
+              <a:t>DAX40  ·  Phase actuelle : Expansion avancée  ·  Sensibilités taux/PIB  ·  Signal de rotation</a:t>
             </a:r>
           </a:p>
         </p:txBody>
@@ -16822,7 +16822,7 @@
                   <a:srgbClr val="555555"/>
                 </a:solidFill>
               </a:rPr>
-              <a:t>La rotation sectorielle recommandee s'appuie sur le modele cycle 4-phases FinSight. En phase d'expansion avancee, le signal Accumuler se concentre sur les secteurs a forte croissance BPA et pricing power : Technology (IA), Health Care (FDA pipeline), Financials (NIM). Le signal Alleger cible Real Estate (pression taux directe) et Utilities...</a:t>
+              <a:t>La rotation sectorielle recommandee s'appuie sur le modele cycle 4-phases FinSight. En phase d'expansion avancée, le signal Accumuler se concentre sur les secteurs a forte croissance BPA et pricing power : Technology (IA), Health Care (FDA pipeline), Financials (NIM). Le signal Alleger cible Real Estate (pression taux directe) et Utilities...</a:t>
             </a:r>
           </a:p>
         </p:txBody>
@@ -19883,7 +19883,7 @@
                   <a:srgbClr val="555555"/>
                 </a:solidFill>
               </a:rPr>
-              <a:t>Le signal global sur le DAX40 est Neutre avec une conviction de 27% (sur la base des 11 secteurs analyses). 3 secteurs ressortent Surponderer — Technology, Health Care et Financials — portes respectivement par le cycle IA, le pricing power defensif et les spreads de credit eleves. 6 secteurs sont Neutre en raison d'une visibilite limitee sur les BPA dans un contexte de taux restrictifs. 2 secteurs (Real Estate, Utilities) sont Sous-ponderer sous pression directe de la politique monetaire.  Le DAX40 affiche un cours de 5 210 (YTD : +4.8%). P/E Forward 21.5x vs médiane historique 10 ans 18.2x — valorisation en ligne avec l'historique. ERP Damodaran 4.2%. Score composite moyen : —/100 —...</a:t>
+              <a:t>Le signal global sur le DAX40 est Neutre avec une conviction de 27% (sur la base des 11 secteurs analyses). 3 secteurs ressortent Surpondérer — Technology, Health Care et Financials — portes respectivement par le cycle IA, le pricing power defensif et les spreads de credit eleves. 6 secteurs sont Neutre en raison d'une visibilite limitee sur les BPA dans un contexte de taux restrictifs. 2 secteurs (Real Estate, Utilities) sont Sous-ponderer sous pression directe de la politique monetaire.  Le DAX40 affiche un cours de 5 210 (YTD : +4.8%). P/E Forward 21.5x vs médiane historique 10 ans 18.2x — valorisation en ligne avec l'historique. ERP Damodaran 4.2%. Score composite moyen : —/100 —...</a:t>
             </a:r>
           </a:p>
         </p:txBody>
@@ -25871,7 +25871,7 @@
                   <a:srgbClr val="555555"/>
                 </a:solidFill>
               </a:rPr>
-              <a:t>Le P/E Forward a 21.5x s'inscrit en prime de 18% par rapport a la mediane 10 ans (18.2x), justifie en partie par la monetisation de l'IA et la qualite superieure des marges. L'ERP ressort a 4.2% — niveau attractif mais contraint par le 10Y US a 4.3%. La compression de multiple reste le principal risque si les taux LT demeurent restrictifs. Le secteur Technologie (P/E 28.5x vs mediane 22x) concentre la prime de valorisation.</a:t>
+              <a:t>Le P/E Forward a 21.5x s'inscrit en prime de 18% par rapport a la mediane 10 ans (18.2x), justifie en partie par la monetisation de l'IA et la qualite superieure des marges. L'ERP ressort a 4.2% — niveau attractif mais contraint par le 10Y US a 4.3%. La compression de multiple reste le principal risque si les taux LT demeurent restrictifs. Le secteur Technologie (P/E 28.5x vs médiane 22x) concentre la prime de valorisation.</a:t>
             </a:r>
           </a:p>
         </p:txBody>
@@ -26462,7 +26462,7 @@
                   <a:srgbClr val="555555"/>
                 </a:solidFill>
               </a:rPr>
-              <a:t>DAX40  ·  Phase actuelle : Expansion avancee  ·  Signaux FRED  ·  Modele 4 phases</a:t>
+              <a:t>DAX40  ·  Phase actuelle : Expansion avancée  ·  Signaux FRED  ·  Modèle 4 phases</a:t>
             </a:r>
           </a:p>
         </p:txBody>
@@ -26650,7 +26650,7 @@
                   <a:srgbClr val="AAAAAA"/>
                 </a:solidFill>
               </a:rPr>
-              <a:t>avancee</a:t>
+              <a:t>avancée</a:t>
             </a:r>
           </a:p>
         </p:txBody>
@@ -26684,7 +26684,7 @@
                   <a:srgbClr val="AAAAAA"/>
                 </a:solidFill>
               </a:rPr>
-              <a:t>Milieu-fin de cycle — ISM proche 50, courbe taux normalisee</a:t>
+              <a:t>Milieu-fin de cycle — ISM proche 50, courbe taux normalisée</a:t>
             </a:r>
           </a:p>
         </p:txBody>
@@ -26718,7 +26718,7 @@
                   <a:srgbClr val="AAAAAA"/>
                 </a:solidFill>
               </a:rPr>
-              <a:t>L'analyse des indicateurs avancees positionne le cycle en phase d'expansion avancee : ISM Manufacturier autour du seuil...</a:t>
+              <a:t>L'analyse des indicateurs avancées positionne le cycle en phase d'expansion avancée : ISM Manufacturier autour du seuil...</a:t>
             </a:r>
           </a:p>
         </p:txBody>
@@ -26867,7 +26867,7 @@
                             <a:srgbClr val="1A1A1A"/>
                           </a:solidFill>
                         </a:rPr>
-                        <a:t>Expansion moderee</a:t>
+                        <a:t>Expansion modérée</a:t>
                       </a:r>
                     </a:p>
                   </a:txBody>
@@ -26933,7 +26933,7 @@
                             <a:srgbClr val="1A1A1A"/>
                           </a:solidFill>
                         </a:rPr>
-                        <a:t>Legerement inversee</a:t>
+                        <a:t>Légèrement inversée</a:t>
                       </a:r>
                     </a:p>
                   </a:txBody>
@@ -27063,7 +27063,7 @@
                             <a:srgbClr val="1A1A1A"/>
                           </a:solidFill>
                         </a:rPr>
-                        <a:t>Marche solide</a:t>
+                        <a:t>Marché solide</a:t>
                       </a:r>
                     </a:p>
                   </a:txBody>
@@ -27255,7 +27255,7 @@
                   <a:srgbClr val="1B3A6B"/>
                 </a:solidFill>
               </a:rPr>
-              <a:t>Allocation recommandee selon le positionnement de cycle</a:t>
+              <a:t>Allocation recommandée selon le positionnement de cycle</a:t>
             </a:r>
           </a:p>
         </p:txBody>
@@ -27289,7 +27289,7 @@
                   <a:srgbClr val="555555"/>
                 </a:solidFill>
               </a:rPr>
-              <a:t>L'analyse des indicateurs avancees positionne le cycle en phase d'expansion avancee : ISM Manufacturier autour du seuil 50 (49.8), courbe des taux partiellement normalisee (10Y-2Y +0.2%), Leading Indicators OCDE en legere hausse. Cette configuration favorise les secteurs avec forte visibilite BPA et moindre sensibilite aux taux : Technology, Health Care, Financials. Les secteurs defensifs (Consumer Staples,...</a:t>
+              <a:t>L'analyse des indicateurs avancées positionne le cycle en phase d'expansion avancée : ISM Manufacturier autour du seuil 50 (49.8), courbe des taux partiellement normalisée (10Y-2Y +0.2%), Leading Indicators OCDE en légère hausse. Cette configuration favorise les secteurs avec forte visibilité BPA et moindre sensibilité aux taux : Technology, Health Care, Financials. Les secteurs défensifs (Consumer Staples,...</a:t>
             </a:r>
           </a:p>
         </p:txBody>

--- a/preview/indice_DAX40/indice_DAX40.pptx
+++ b/preview/indice_DAX40/indice_DAX40.pptx
@@ -12788,7 +12788,7 @@
                   <a:srgbClr val="555555"/>
                 </a:solidFill>
               </a:rPr>
-              <a:t>P/E actuel vs médiane historique 10 ans  ·  Signal d'entree Accumuler / Neutre / Alleger</a:t>
+              <a:t>P/E actuel vs médiane historique 10 ans  ·  Signal d'entrée Accumuler / Neutre / Alléger</a:t>
             </a:r>
           </a:p>
         </p:txBody>
@@ -12966,13 +12966,13 @@
                   <a:srgbClr val="555555"/>
                 </a:solidFill>
               </a:rPr>
-              <a:t>PE mediane 10 ans : 18.2x
+              <a:t>PE médiane 10 ans : 18.2x
 PE Forward indice : 21.5x
 Zone d'entrée favorable (PE &lt; mediane) :
 Financials
 Zone de prudence (PE &gt; mediane +15 %) :
 Technology
-Methodologie : le PE Forward estime est ancre sur le PE global de l'indice ajuste du score sectoriel (+/- ecart). Les secteurs a gauche de la ligne pointillee (mediane 10 ans) offrent un meilleur point d'entree. Un ecart &gt; +20 % vs la mediane justifie une prudence accrue sur le timing.</a:t>
+Methodologie : le PE Forward estime est ancre sur le PE global de l'indice ajuste du score sectoriel (+/- ecart). Les secteurs a gauche de la ligne pointillee (mediane 10 ans) offrent un meilleur point d'entree. Un ecart &gt; +20 % vs la médiane justifie une prudence accrue sur le timing.</a:t>
             </a:r>
           </a:p>
         </p:txBody>
@@ -16442,7 +16442,7 @@
                             <a:srgbClr val="B06000"/>
                           </a:solidFill>
                         </a:rPr>
-                        <a:t>Alleger</a:t>
+                        <a:t>Alléger</a:t>
                       </a:r>
                     </a:p>
                   </a:txBody>
@@ -16554,7 +16554,7 @@
                             <a:srgbClr val="B06000"/>
                           </a:solidFill>
                         </a:rPr>
-                        <a:t>Alleger</a:t>
+                        <a:t>Alléger</a:t>
                       </a:r>
                     </a:p>
                   </a:txBody>
@@ -16658,7 +16658,7 @@
                             <a:srgbClr val="B06000"/>
                           </a:solidFill>
                         </a:rPr>
-                        <a:t>Alleger</a:t>
+                        <a:t>Alléger</a:t>
                       </a:r>
                     </a:p>
                   </a:txBody>
@@ -16822,7 +16822,7 @@
                   <a:srgbClr val="555555"/>
                 </a:solidFill>
               </a:rPr>
-              <a:t>La rotation sectorielle recommandee s'appuie sur le modele cycle 4-phases FinSight. En phase d'expansion avancée, le signal Accumuler se concentre sur les secteurs a forte croissance BPA et pricing power : Technology (IA), Health Care (FDA pipeline), Financials (NIM). Le signal Alleger cible Real Estate (pression taux directe) et Utilities...</a:t>
+              <a:t>La rotation sectorielle recommandee s'appuie sur le modele cycle 4-phases FinSight. En phase d'expansion avancée, le signal Accumuler se concentre sur les secteurs a forte croissance BPA et pricing power : Technology (IA), Health Care (FDA pipeline), Financials (NIM). Le signal Alléger cible Real Estate (pression taux directe) et Utilities...</a:t>
             </a:r>
           </a:p>
         </p:txBody>
@@ -25365,7 +25365,7 @@
                             <a:srgbClr val="1A1A1A"/>
                           </a:solidFill>
                         </a:rPr>
-                        <a:t>Prime vs mediane 10Y</a:t>
+                        <a:t>Prime vs médiane 10Y</a:t>
                       </a:r>
                     </a:p>
                   </a:txBody>
@@ -25453,7 +25453,7 @@
                             <a:srgbClr val="1A1A1A"/>
                           </a:solidFill>
                         </a:rPr>
-                        <a:t>Niveau historique normalise</a:t>
+                        <a:t>Niveau historique normalisé</a:t>
                       </a:r>
                     </a:p>
                   </a:txBody>
@@ -25689,7 +25689,7 @@
                             <a:srgbClr val="1A1A1A"/>
                           </a:solidFill>
                         </a:rPr>
-                        <a:t>Surevalu si &gt; 20 %</a:t>
+                        <a:t>Surévalué si &gt; 20 %</a:t>
                       </a:r>
                     </a:p>
                   </a:txBody>
@@ -25709,7 +25709,7 @@
                             <a:srgbClr val="1A1A1A"/>
                           </a:solidFill>
                         </a:rPr>
-                        <a:t>Signal d alerte valorisation</a:t>
+                        <a:t>Signal d'alerte valorisation</a:t>
                       </a:r>
                     </a:p>
                   </a:txBody>
@@ -27019,7 +27019,7 @@
                             <a:srgbClr val="1A1A1A"/>
                           </a:solidFill>
                         </a:rPr>
-                        <a:t>Chomage</a:t>
+                        <a:t>Chômage</a:t>
                       </a:r>
                     </a:p>
                   </a:txBody>
